--- a/docs/pitch/kovan-pitch-deck.pptx
+++ b/docs/pitch/kovan-pitch-deck.pptx
@@ -822,7 +822,7 @@
           </a:p>
           <a:p>
             <a:r>
-              <a:t>Optional extensions only after deployment and funded rehearsal: delegation with on-chain evidence; owner-approved mandates; DeFindex yield. Avoid spending the core demo on unrehearsed integrations.</a:t>
+              <a:t>Owner-approved mandates are live on the current release (rehearsed with a direct payment on an isolated pool; not yet through the x402 facilitator). Delegation has no on-chain evidence yet and DeFindex yield is not activated: keep both out of the live demo unless rehearsed.</a:t>
             </a:r>
           </a:p>
           <a:p/>
@@ -903,7 +903,7 @@
           </a:p>
           <a:p>
             <a:r>
-              <a:t>[Introduce each teammate and the part they built. Names and roles are intentionally left open at the user's request.]</a:t>
+              <a:t>Robert Lopez, DevOps Engineer: contracts, SDK, console, agent tooling and deployments. Esteban Brenes, Product Manager: product, pitch, docs and submission. Sebastián Ceciliano, AI Developer / Designer: website, brand and the signing-page design.</a:t>
             </a:r>
           </a:p>
           <a:p>
@@ -914,7 +914,7 @@
           <a:p/>
           <a:p>
             <a:r>
-              <a:t>If names are not filled before the presentation, introduce the team verbally. Do not claim a precise 24-hour build duration without confirming it.</a:t>
+              <a:t>Do not claim a precise 24-hour build duration without confirming it.</a:t>
             </a:r>
           </a:p>
           <a:p>
@@ -11074,7 +11074,7 @@
                 </a:solidFill>
                 <a:latin typeface="JetBrains Mono"/>
               </a:rPr>
-              <a:t>TEAM / ADD NAMES AND ROLES</a:t>
+              <a:t>TEAM</a:t>
             </a:r>
           </a:p>
         </p:txBody>
@@ -11088,7 +11088,7 @@
         <p:spPr>
           <a:xfrm>
             <a:off x="777240" y="4910328"/>
-            <a:ext cx="8001000" cy="548640"/>
+            <a:ext cx="4754880" cy="548640"/>
           </a:xfrm>
           <a:prstGeom prst="rect">
             <a:avLst/>
@@ -11115,18 +11115,63 @@
             <a:r>
               <a:rPr sz="3000" b="1">
                 <a:solidFill>
-                  <a:srgbClr val="A3A8B1"/>
+                  <a:srgbClr val="151A24"/>
                 </a:solidFill>
                 <a:latin typeface="Manrope"/>
               </a:rPr>
-              <a:t>Name / role</a:t>
+              <a:t>Robert Lopez</a:t>
+            </a:r>
+          </a:p>
+        </p:txBody>
+      </p:sp>
+      <p:sp>
+        <p:nvSpPr>
+          <p:cNvPr id="16" name="TextBox 15"/>
+          <p:cNvSpPr txBox="1"/>
+          <p:nvPr/>
+        </p:nvSpPr>
+        <p:spPr>
+          <a:xfrm>
+            <a:off x="5532120" y="4965192"/>
+            <a:ext cx="3246120" cy="502920"/>
+          </a:xfrm>
+          <a:prstGeom prst="rect">
+            <a:avLst/>
+          </a:prstGeom>
+          <a:noFill/>
+        </p:spPr>
+        <p:txBody>
+          <a:bodyPr wrap="none" lIns="0" rIns="0" tIns="0" bIns="0" anchor="t">
+            <a:spAutoFit/>
+          </a:bodyPr>
+          <a:lstStyle/>
+          <a:p>
+            <a:pPr algn="l">
+              <a:lnSpc>
+                <a:spcPts val="2477"/>
+              </a:lnSpc>
+              <a:spcBef>
+                <a:spcPts val="0"/>
+              </a:spcBef>
+              <a:spcAft>
+                <a:spcPts val="0"/>
+              </a:spcAft>
+            </a:pPr>
+            <a:r>
+              <a:rPr sz="2100" b="0">
+                <a:solidFill>
+                  <a:srgbClr val="626977"/>
+                </a:solidFill>
+                <a:latin typeface="Inter"/>
+              </a:rPr>
+              <a:t>DevOps Engineer</a:t>
             </a:r>
           </a:p>
         </p:txBody>
       </p:sp>
       <p:cxnSp>
         <p:nvCxnSpPr>
-          <p:cNvPr id="16" name="Connector 15"/>
+          <p:cNvPr id="17" name="Connector 16"/>
           <p:cNvCxnSpPr/>
           <p:nvPr/>
         </p:nvCxnSpPr>
@@ -11162,14 +11207,14 @@
       </p:cxnSp>
       <p:sp>
         <p:nvSpPr>
-          <p:cNvPr id="17" name="TextBox 16"/>
+          <p:cNvPr id="18" name="TextBox 17"/>
           <p:cNvSpPr txBox="1"/>
           <p:nvPr/>
         </p:nvSpPr>
         <p:spPr>
           <a:xfrm>
             <a:off x="777240" y="6035040"/>
-            <a:ext cx="8001000" cy="548640"/>
+            <a:ext cx="4754880" cy="548640"/>
           </a:xfrm>
           <a:prstGeom prst="rect">
             <a:avLst/>
@@ -11196,18 +11241,63 @@
             <a:r>
               <a:rPr sz="3000" b="1">
                 <a:solidFill>
-                  <a:srgbClr val="A3A8B1"/>
+                  <a:srgbClr val="151A24"/>
                 </a:solidFill>
                 <a:latin typeface="Manrope"/>
               </a:rPr>
-              <a:t>Name / role</a:t>
+              <a:t>Esteban Brenes</a:t>
+            </a:r>
+          </a:p>
+        </p:txBody>
+      </p:sp>
+      <p:sp>
+        <p:nvSpPr>
+          <p:cNvPr id="19" name="TextBox 18"/>
+          <p:cNvSpPr txBox="1"/>
+          <p:nvPr/>
+        </p:nvSpPr>
+        <p:spPr>
+          <a:xfrm>
+            <a:off x="5532120" y="6089903"/>
+            <a:ext cx="3246120" cy="502920"/>
+          </a:xfrm>
+          <a:prstGeom prst="rect">
+            <a:avLst/>
+          </a:prstGeom>
+          <a:noFill/>
+        </p:spPr>
+        <p:txBody>
+          <a:bodyPr wrap="none" lIns="0" rIns="0" tIns="0" bIns="0" anchor="t">
+            <a:spAutoFit/>
+          </a:bodyPr>
+          <a:lstStyle/>
+          <a:p>
+            <a:pPr algn="l">
+              <a:lnSpc>
+                <a:spcPts val="2477"/>
+              </a:lnSpc>
+              <a:spcBef>
+                <a:spcPts val="0"/>
+              </a:spcBef>
+              <a:spcAft>
+                <a:spcPts val="0"/>
+              </a:spcAft>
+            </a:pPr>
+            <a:r>
+              <a:rPr sz="2100" b="0">
+                <a:solidFill>
+                  <a:srgbClr val="626977"/>
+                </a:solidFill>
+                <a:latin typeface="Inter"/>
+              </a:rPr>
+              <a:t>Product Manager</a:t>
             </a:r>
           </a:p>
         </p:txBody>
       </p:sp>
       <p:cxnSp>
         <p:nvCxnSpPr>
-          <p:cNvPr id="18" name="Connector 17"/>
+          <p:cNvPr id="20" name="Connector 19"/>
           <p:cNvCxnSpPr/>
           <p:nvPr/>
         </p:nvCxnSpPr>
@@ -11243,14 +11333,14 @@
       </p:cxnSp>
       <p:sp>
         <p:nvSpPr>
-          <p:cNvPr id="19" name="TextBox 18"/>
+          <p:cNvPr id="21" name="TextBox 20"/>
           <p:cNvSpPr txBox="1"/>
           <p:nvPr/>
         </p:nvSpPr>
         <p:spPr>
           <a:xfrm>
             <a:off x="777240" y="7159752"/>
-            <a:ext cx="8001000" cy="548640"/>
+            <a:ext cx="4754880" cy="548640"/>
           </a:xfrm>
           <a:prstGeom prst="rect">
             <a:avLst/>
@@ -11277,18 +11367,63 @@
             <a:r>
               <a:rPr sz="3000" b="1">
                 <a:solidFill>
-                  <a:srgbClr val="A3A8B1"/>
+                  <a:srgbClr val="151A24"/>
                 </a:solidFill>
                 <a:latin typeface="Manrope"/>
               </a:rPr>
-              <a:t>Name / role</a:t>
+              <a:t>Sebastián Ceciliano</a:t>
+            </a:r>
+          </a:p>
+        </p:txBody>
+      </p:sp>
+      <p:sp>
+        <p:nvSpPr>
+          <p:cNvPr id="22" name="TextBox 21"/>
+          <p:cNvSpPr txBox="1"/>
+          <p:nvPr/>
+        </p:nvSpPr>
+        <p:spPr>
+          <a:xfrm>
+            <a:off x="5532120" y="7214616"/>
+            <a:ext cx="3246120" cy="502920"/>
+          </a:xfrm>
+          <a:prstGeom prst="rect">
+            <a:avLst/>
+          </a:prstGeom>
+          <a:noFill/>
+        </p:spPr>
+        <p:txBody>
+          <a:bodyPr wrap="none" lIns="0" rIns="0" tIns="0" bIns="0" anchor="t">
+            <a:spAutoFit/>
+          </a:bodyPr>
+          <a:lstStyle/>
+          <a:p>
+            <a:pPr algn="l">
+              <a:lnSpc>
+                <a:spcPts val="2477"/>
+              </a:lnSpc>
+              <a:spcBef>
+                <a:spcPts val="0"/>
+              </a:spcBef>
+              <a:spcAft>
+                <a:spcPts val="0"/>
+              </a:spcAft>
+            </a:pPr>
+            <a:r>
+              <a:rPr sz="2100" b="0">
+                <a:solidFill>
+                  <a:srgbClr val="626977"/>
+                </a:solidFill>
+                <a:latin typeface="Inter"/>
+              </a:rPr>
+              <a:t>AI Developer / Designer</a:t>
             </a:r>
           </a:p>
         </p:txBody>
       </p:sp>
       <p:cxnSp>
         <p:nvCxnSpPr>
-          <p:cNvPr id="20" name="Connector 19"/>
+          <p:cNvPr id="23" name="Connector 22"/>
           <p:cNvCxnSpPr/>
           <p:nvPr/>
         </p:nvCxnSpPr>
@@ -11324,7 +11459,7 @@
       </p:cxnSp>
       <p:sp>
         <p:nvSpPr>
-          <p:cNvPr id="21" name="TextBox 20"/>
+          <p:cNvPr id="24" name="TextBox 23"/>
           <p:cNvSpPr txBox="1"/>
           <p:nvPr/>
         </p:nvSpPr>
@@ -11369,7 +11504,7 @@
       </p:sp>
       <p:sp>
         <p:nvSpPr>
-          <p:cNvPr id="22" name="Rounded Rectangle 21"/>
+          <p:cNvPr id="25" name="Rounded Rectangle 24"/>
           <p:cNvSpPr/>
           <p:nvPr/>
         </p:nvSpPr>
@@ -11415,7 +11550,7 @@
       </p:sp>
       <p:sp>
         <p:nvSpPr>
-          <p:cNvPr id="23" name="Freeform 22"/>
+          <p:cNvPr id="26" name="Freeform 25"/>
           <p:cNvSpPr/>
           <p:nvPr/>
         </p:nvSpPr>
@@ -11480,7 +11615,7 @@
       </p:sp>
       <p:sp>
         <p:nvSpPr>
-          <p:cNvPr id="24" name="Freeform 23"/>
+          <p:cNvPr id="27" name="Freeform 26"/>
           <p:cNvSpPr/>
           <p:nvPr/>
         </p:nvSpPr>
@@ -11542,7 +11677,7 @@
       </p:sp>
       <p:sp>
         <p:nvSpPr>
-          <p:cNvPr id="25" name="TextBox 24"/>
+          <p:cNvPr id="28" name="TextBox 27"/>
           <p:cNvSpPr txBox="1"/>
           <p:nvPr/>
         </p:nvSpPr>
@@ -11609,7 +11744,7 @@
       </p:sp>
       <p:sp>
         <p:nvSpPr>
-          <p:cNvPr id="26" name="TextBox 25">
+          <p:cNvPr id="29" name="TextBox 28">
             <a:hlinkClick r:id="rId3"/>
           </p:cNvPr>
           <p:cNvSpPr txBox="1"/>
@@ -11656,7 +11791,7 @@
       </p:sp>
       <p:sp>
         <p:nvSpPr>
-          <p:cNvPr id="27" name="TextBox 26">
+          <p:cNvPr id="30" name="TextBox 29">
             <a:hlinkClick r:id="rId4"/>
           </p:cNvPr>
           <p:cNvSpPr txBox="1"/>
